--- a/assets/pptx/catalog-40.pptx
+++ b/assets/pptx/catalog-40.pptx
@@ -3351,7 +3351,7 @@
                 <a:ea typeface="Ebrima"/>
                 <a:cs typeface="Ebrima"/>
               </a:rPr>
-              <a:t>እግዚአብሔር መልካም ነው (2x)</a:t>
+              <a:t>እግዚአብሔር መልካም ነው 2x</a:t>
             </a:r>
           </a:p>
           <a:p>
@@ -3405,7 +3405,7 @@
                 <a:ea typeface="Ebrima"/>
                 <a:cs typeface="Ebrima"/>
               </a:rPr>
-              <a:t>ነገሬ የሰመረው (3x)</a:t>
+              <a:t>ነገሬ የሰመረው 3x</a:t>
             </a:r>
           </a:p>
           <a:p>
@@ -3423,7 +3423,7 @@
                 <a:ea typeface="Ebrima"/>
                 <a:cs typeface="Ebrima"/>
               </a:rPr>
-              <a:t>ከኢየሱስ የተነሳ ነው (2x)</a:t>
+              <a:t>ከኢየሱስ የተነሳ ነው 2x</a:t>
             </a:r>
           </a:p>
           <a:p>
@@ -3441,7 +3441,7 @@
                 <a:ea typeface="Ebrima"/>
                 <a:cs typeface="Ebrima"/>
               </a:rPr>
-              <a:t>ከኢየሱስ የተነሳ ነው (4x)</a:t>
+              <a:t>ከኢየሱስ የተነሳ ነው 4x</a:t>
             </a:r>
           </a:p>
         </p:txBody>
@@ -3544,7 +3544,7 @@
                 <a:ea typeface="Ebrima"/>
                 <a:cs typeface="Ebrima"/>
               </a:rPr>
-              <a:t>ምክንያቱ አንድ ነው እግዚአብሄር መልካም ነው (2x)</a:t>
+              <a:t>ምክንያቱ አንድ ነው እግዚአብሄር መልካም ነው 2x</a:t>
             </a:r>
           </a:p>
         </p:txBody>
@@ -3611,7 +3611,7 @@
                 <a:ea typeface="Ebrima"/>
                 <a:cs typeface="Ebrima"/>
               </a:rPr>
-              <a:t>እግዚአብሔር መልካም ነው (2x)</a:t>
+              <a:t>እግዚአብሔር መልካም ነው 2x</a:t>
             </a:r>
           </a:p>
           <a:p>
@@ -3665,7 +3665,7 @@
                 <a:ea typeface="Ebrima"/>
                 <a:cs typeface="Ebrima"/>
               </a:rPr>
-              <a:t>ነገሬ የሰመረው (3x)</a:t>
+              <a:t>ነገሬ የሰመረው 3x</a:t>
             </a:r>
           </a:p>
           <a:p>
@@ -3683,7 +3683,7 @@
                 <a:ea typeface="Ebrima"/>
                 <a:cs typeface="Ebrima"/>
               </a:rPr>
-              <a:t>ከኢየሱስ የተነሳ ነው (2x)</a:t>
+              <a:t>ከኢየሱስ የተነሳ ነው 2x</a:t>
             </a:r>
           </a:p>
           <a:p>
@@ -3701,7 +3701,7 @@
                 <a:ea typeface="Ebrima"/>
                 <a:cs typeface="Ebrima"/>
               </a:rPr>
-              <a:t>ከኢየሱስ የተነሳ ነው (4x)</a:t>
+              <a:t>ከኢየሱስ የተነሳ ነው 4x</a:t>
             </a:r>
           </a:p>
         </p:txBody>
@@ -4113,7 +4113,7 @@
                 <a:ea typeface="Ebrima"/>
                 <a:cs typeface="Ebrima"/>
               </a:rPr>
-              <a:t>እግዚአብሔር መልካም ነው (2x)</a:t>
+              <a:t>እግዚአብሔር መልካም ነው 2x</a:t>
             </a:r>
           </a:p>
           <a:p>
@@ -4167,7 +4167,7 @@
                 <a:ea typeface="Ebrima"/>
                 <a:cs typeface="Ebrima"/>
               </a:rPr>
-              <a:t>ነገሬ የሰመረው (3x)</a:t>
+              <a:t>ነገሬ የሰመረው 3x</a:t>
             </a:r>
           </a:p>
           <a:p>
@@ -4185,7 +4185,7 @@
                 <a:ea typeface="Ebrima"/>
                 <a:cs typeface="Ebrima"/>
               </a:rPr>
-              <a:t>ከኢየሱስ የተነሳ ነው (2x)</a:t>
+              <a:t>ከኢየሱስ የተነሳ ነው 2x</a:t>
             </a:r>
           </a:p>
           <a:p>
@@ -4203,7 +4203,7 @@
                 <a:ea typeface="Ebrima"/>
                 <a:cs typeface="Ebrima"/>
               </a:rPr>
-              <a:t>ከኢየሱስ የተነሳ ነው (4x)</a:t>
+              <a:t>ከኢየሱስ የተነሳ ነው 4x</a:t>
             </a:r>
           </a:p>
         </p:txBody>
